--- a/docs/dhruva.pptx
+++ b/docs/dhruva.pptx
@@ -4780,7 +4780,7 @@
                 </a:solidFill>
                 <a:latin typeface="Courier New"/>
               </a:rPr>
-              <a:t>THE CLAIM, MEASURED</a:t>
+              <a:t>MEASUREMENTS</a:t>
             </a:r>
           </a:p>
         </p:txBody>
